--- a/markdown/files/slides/lecture4_analysis2_pqs.pptx
+++ b/markdown/files/slides/lecture4_analysis2_pqs.pptx
@@ -5,7 +5,7 @@
     <p:sldMasterId id="2147483648" r:id="rId1"/>
   </p:sldMasterIdLst>
   <p:notesMasterIdLst>
-    <p:notesMasterId r:id="rId29"/>
+    <p:notesMasterId r:id="rId30"/>
   </p:notesMasterIdLst>
   <p:sldIdLst>
     <p:sldId id="256" r:id="rId2"/>
@@ -19,29 +19,30 @@
     <p:sldId id="446" r:id="rId10"/>
     <p:sldId id="457" r:id="rId11"/>
     <p:sldId id="458" r:id="rId12"/>
-    <p:sldId id="448" r:id="rId13"/>
-    <p:sldId id="402" r:id="rId14"/>
-    <p:sldId id="460" r:id="rId15"/>
-    <p:sldId id="406" r:id="rId16"/>
-    <p:sldId id="409" r:id="rId17"/>
-    <p:sldId id="267" r:id="rId18"/>
-    <p:sldId id="412" r:id="rId19"/>
-    <p:sldId id="413" r:id="rId20"/>
-    <p:sldId id="414" r:id="rId21"/>
-    <p:sldId id="415" r:id="rId22"/>
-    <p:sldId id="417" r:id="rId23"/>
-    <p:sldId id="454" r:id="rId24"/>
-    <p:sldId id="421" r:id="rId25"/>
-    <p:sldId id="418" r:id="rId26"/>
-    <p:sldId id="423" r:id="rId27"/>
-    <p:sldId id="424" r:id="rId28"/>
+    <p:sldId id="447" r:id="rId13"/>
+    <p:sldId id="461" r:id="rId14"/>
+    <p:sldId id="402" r:id="rId15"/>
+    <p:sldId id="460" r:id="rId16"/>
+    <p:sldId id="406" r:id="rId17"/>
+    <p:sldId id="409" r:id="rId18"/>
+    <p:sldId id="267" r:id="rId19"/>
+    <p:sldId id="412" r:id="rId20"/>
+    <p:sldId id="413" r:id="rId21"/>
+    <p:sldId id="414" r:id="rId22"/>
+    <p:sldId id="415" r:id="rId23"/>
+    <p:sldId id="417" r:id="rId24"/>
+    <p:sldId id="454" r:id="rId25"/>
+    <p:sldId id="421" r:id="rId26"/>
+    <p:sldId id="418" r:id="rId27"/>
+    <p:sldId id="423" r:id="rId28"/>
+    <p:sldId id="424" r:id="rId29"/>
   </p:sldIdLst>
   <p:sldSz cx="12192000" cy="6858000"/>
   <p:notesSz cx="6858000" cy="9144000"/>
   <p:embeddedFontLst>
     <p:embeddedFont>
       <p:font typeface="Cambria Math" panose="02040503050406030204" pitchFamily="18" charset="0"/>
-      <p:regular r:id="rId30"/>
+      <p:regular r:id="rId31"/>
     </p:embeddedFont>
   </p:embeddedFontLst>
   <p:defaultTextStyle>
@@ -5035,6 +5036,859 @@
         <p:cNvPr id="1" name="">
           <a:extLst>
             <a:ext uri="{FF2B5EF4-FFF2-40B4-BE49-F238E27FC236}">
+              <a16:creationId xmlns:a16="http://schemas.microsoft.com/office/drawing/2014/main" id="{3C6AF14A-D064-54E0-6BBF-CF65280EB43B}"/>
+            </a:ext>
+          </a:extLst>
+        </p:cNvPr>
+        <p:cNvGrpSpPr/>
+        <p:nvPr/>
+      </p:nvGrpSpPr>
+      <p:grpSpPr>
+        <a:xfrm>
+          <a:off x="0" y="0"/>
+          <a:ext cx="0" cy="0"/>
+          <a:chOff x="0" y="0"/>
+          <a:chExt cx="0" cy="0"/>
+        </a:xfrm>
+      </p:grpSpPr>
+      <p:sp>
+        <p:nvSpPr>
+          <p:cNvPr id="2" name="Title 1">
+            <a:extLst>
+              <a:ext uri="{FF2B5EF4-FFF2-40B4-BE49-F238E27FC236}">
+                <a16:creationId xmlns:a16="http://schemas.microsoft.com/office/drawing/2014/main" id="{AAE2F9BC-8583-F6DE-8ADA-F9EB3C140610}"/>
+              </a:ext>
+            </a:extLst>
+          </p:cNvPr>
+          <p:cNvSpPr>
+            <a:spLocks noGrp="1"/>
+          </p:cNvSpPr>
+          <p:nvPr>
+            <p:ph type="title"/>
+          </p:nvPr>
+        </p:nvSpPr>
+        <p:spPr/>
+        <p:txBody>
+          <a:bodyPr/>
+          <a:lstStyle/>
+          <a:p>
+            <a:r>
+              <a:rPr lang="en-US" dirty="0"/>
+              <a:t>Asymptotic Notation Example 2 (Scratchwork)</a:t>
+            </a:r>
+          </a:p>
+        </p:txBody>
+      </p:sp>
+      <mc:AlternateContent xmlns:mc="http://schemas.openxmlformats.org/markup-compatibility/2006" xmlns:a14="http://schemas.microsoft.com/office/drawing/2010/main">
+        <mc:Choice Requires="a14">
+          <p:sp>
+            <p:nvSpPr>
+              <p:cNvPr id="3" name="Content Placeholder 2">
+                <a:extLst>
+                  <a:ext uri="{FF2B5EF4-FFF2-40B4-BE49-F238E27FC236}">
+                    <a16:creationId xmlns:a16="http://schemas.microsoft.com/office/drawing/2014/main" id="{B715BD7A-5944-DE50-FFDA-22BA9A22331A}"/>
+                  </a:ext>
+                </a:extLst>
+              </p:cNvPr>
+              <p:cNvSpPr>
+                <a:spLocks noGrp="1"/>
+              </p:cNvSpPr>
+              <p:nvPr>
+                <p:ph idx="1"/>
+              </p:nvPr>
+            </p:nvSpPr>
+            <p:spPr>
+              <a:xfrm>
+                <a:off x="609600" y="1874837"/>
+                <a:ext cx="11430000" cy="4525963"/>
+              </a:xfrm>
+            </p:spPr>
+            <p:txBody>
+              <a:bodyPr anchor="t">
+                <a:normAutofit lnSpcReduction="10000"/>
+              </a:bodyPr>
+              <a:lstStyle/>
+              <a:p>
+                <a:r>
+                  <a:rPr lang="en-US" dirty="0"/>
+                  <a:t>Show: </a:t>
+                </a:r>
+                <a14:m>
+                  <m:oMath xmlns:m="http://schemas.openxmlformats.org/officeDocument/2006/math">
+                    <m:r>
+                      <a:rPr lang="en-US" b="0" i="0" smtClean="0">
+                        <a:latin typeface="Cambria Math" panose="02040503050406030204" pitchFamily="18" charset="0"/>
+                      </a:rPr>
+                      <m:t>13</m:t>
+                    </m:r>
+                    <m:sSup>
+                      <m:sSupPr>
+                        <m:ctrlPr>
+                          <a:rPr lang="en-US" b="0" i="1" smtClean="0">
+                            <a:latin typeface="Cambria Math" panose="02040503050406030204" pitchFamily="18" charset="0"/>
+                          </a:rPr>
+                        </m:ctrlPr>
+                      </m:sSupPr>
+                      <m:e>
+                        <m:r>
+                          <m:rPr>
+                            <m:sty m:val="p"/>
+                          </m:rPr>
+                          <a:rPr lang="en-US" b="0" i="0" smtClean="0">
+                            <a:latin typeface="Cambria Math" panose="02040503050406030204" pitchFamily="18" charset="0"/>
+                          </a:rPr>
+                          <m:t>n</m:t>
+                        </m:r>
+                      </m:e>
+                      <m:sup>
+                        <m:r>
+                          <a:rPr lang="en-US" b="0" i="0" smtClean="0">
+                            <a:latin typeface="Cambria Math" panose="02040503050406030204" pitchFamily="18" charset="0"/>
+                          </a:rPr>
+                          <m:t>2</m:t>
+                        </m:r>
+                      </m:sup>
+                    </m:sSup>
+                    <m:r>
+                      <a:rPr lang="en-US" b="0" i="0" smtClean="0">
+                        <a:latin typeface="Cambria Math" panose="02040503050406030204" pitchFamily="18" charset="0"/>
+                      </a:rPr>
+                      <m:t>−50</m:t>
+                    </m:r>
+                    <m:r>
+                      <m:rPr>
+                        <m:sty m:val="p"/>
+                      </m:rPr>
+                      <a:rPr lang="en-US" b="0" i="0" smtClean="0">
+                        <a:latin typeface="Cambria Math" panose="02040503050406030204" pitchFamily="18" charset="0"/>
+                      </a:rPr>
+                      <m:t>n</m:t>
+                    </m:r>
+                    <m:r>
+                      <a:rPr lang="en-US" b="0" i="1" smtClean="0">
+                        <a:latin typeface="Cambria Math"/>
+                      </a:rPr>
+                      <m:t>∈</m:t>
+                    </m:r>
+                    <m:r>
+                      <m:rPr>
+                        <m:sty m:val="p"/>
+                      </m:rPr>
+                      <a:rPr lang="en-US" b="0" i="0" smtClean="0">
+                        <a:latin typeface="Cambria Math" panose="02040503050406030204" pitchFamily="18" charset="0"/>
+                      </a:rPr>
+                      <m:t>Ω</m:t>
+                    </m:r>
+                    <m:d>
+                      <m:dPr>
+                        <m:ctrlPr>
+                          <a:rPr lang="en-US" b="0" i="1" smtClean="0">
+                            <a:latin typeface="Cambria Math" panose="02040503050406030204" pitchFamily="18" charset="0"/>
+                          </a:rPr>
+                        </m:ctrlPr>
+                      </m:dPr>
+                      <m:e>
+                        <m:sSup>
+                          <m:sSupPr>
+                            <m:ctrlPr>
+                              <a:rPr lang="en-US" b="0" i="1" smtClean="0">
+                                <a:latin typeface="Cambria Math" panose="02040503050406030204" pitchFamily="18" charset="0"/>
+                              </a:rPr>
+                            </m:ctrlPr>
+                          </m:sSupPr>
+                          <m:e>
+                            <m:r>
+                              <a:rPr lang="en-US" b="0" i="1" smtClean="0">
+                                <a:latin typeface="Cambria Math"/>
+                              </a:rPr>
+                              <m:t>𝑛</m:t>
+                            </m:r>
+                          </m:e>
+                          <m:sup>
+                            <m:r>
+                              <a:rPr lang="en-US" b="0" i="1" smtClean="0">
+                                <a:latin typeface="Cambria Math"/>
+                              </a:rPr>
+                              <m:t>2</m:t>
+                            </m:r>
+                          </m:sup>
+                        </m:sSup>
+                      </m:e>
+                    </m:d>
+                  </m:oMath>
+                </a14:m>
+                <a:endParaRPr lang="en-US" dirty="0"/>
+              </a:p>
+              <a:p>
+                <a:pPr lvl="1"/>
+                <a:r>
+                  <a:rPr lang="en-US" b="1" dirty="0"/>
+                  <a:t>Technique: </a:t>
+                </a:r>
+                <a:r>
+                  <a:rPr lang="en-US" dirty="0"/>
+                  <a:t>find values </a:t>
+                </a:r>
+                <a14:m>
+                  <m:oMath xmlns:m="http://schemas.openxmlformats.org/officeDocument/2006/math">
+                    <m:r>
+                      <a:rPr lang="en-US" b="0" i="1" smtClean="0">
+                        <a:latin typeface="Cambria Math" panose="02040503050406030204" pitchFamily="18" charset="0"/>
+                      </a:rPr>
+                      <m:t>𝑐</m:t>
+                    </m:r>
+                    <m:r>
+                      <a:rPr lang="en-US" b="0" i="1" smtClean="0">
+                        <a:latin typeface="Cambria Math" panose="02040503050406030204" pitchFamily="18" charset="0"/>
+                      </a:rPr>
+                      <m:t>&gt;0</m:t>
+                    </m:r>
+                  </m:oMath>
+                </a14:m>
+                <a:r>
+                  <a:rPr lang="en-US" dirty="0"/>
+                  <a:t> and </a:t>
+                </a:r>
+                <a14:m>
+                  <m:oMath xmlns:m="http://schemas.openxmlformats.org/officeDocument/2006/math">
+                    <m:sSub>
+                      <m:sSubPr>
+                        <m:ctrlPr>
+                          <a:rPr lang="en-US" b="0" i="1" smtClean="0">
+                            <a:latin typeface="Cambria Math" panose="02040503050406030204" pitchFamily="18" charset="0"/>
+                          </a:rPr>
+                        </m:ctrlPr>
+                      </m:sSubPr>
+                      <m:e>
+                        <m:r>
+                          <a:rPr lang="en-US" b="0" i="1" smtClean="0">
+                            <a:latin typeface="Cambria Math" panose="02040503050406030204" pitchFamily="18" charset="0"/>
+                          </a:rPr>
+                          <m:t>𝑛</m:t>
+                        </m:r>
+                      </m:e>
+                      <m:sub>
+                        <m:r>
+                          <a:rPr lang="en-US" b="0" i="1" smtClean="0">
+                            <a:latin typeface="Cambria Math" panose="02040503050406030204" pitchFamily="18" charset="0"/>
+                          </a:rPr>
+                          <m:t>0</m:t>
+                        </m:r>
+                      </m:sub>
+                    </m:sSub>
+                    <m:r>
+                      <a:rPr lang="en-US" b="0" i="1" smtClean="0">
+                        <a:latin typeface="Cambria Math" panose="02040503050406030204" pitchFamily="18" charset="0"/>
+                      </a:rPr>
+                      <m:t>&gt;0</m:t>
+                    </m:r>
+                  </m:oMath>
+                </a14:m>
+                <a:r>
+                  <a:rPr lang="en-US" dirty="0"/>
+                  <a:t> such that </a:t>
+                </a:r>
+                <a14:m>
+                  <m:oMath xmlns:m="http://schemas.openxmlformats.org/officeDocument/2006/math">
+                    <m:r>
+                      <a:rPr lang="en-US" b="0" i="1" smtClean="0">
+                        <a:latin typeface="Cambria Math" panose="02040503050406030204" pitchFamily="18" charset="0"/>
+                      </a:rPr>
+                      <m:t>∀</m:t>
+                    </m:r>
+                    <m:r>
+                      <a:rPr lang="en-US" b="0" i="1" smtClean="0">
+                        <a:latin typeface="Cambria Math" panose="02040503050406030204" pitchFamily="18" charset="0"/>
+                      </a:rPr>
+                      <m:t>𝑛</m:t>
+                    </m:r>
+                    <m:r>
+                      <a:rPr lang="en-US" b="0" i="1" smtClean="0">
+                        <a:latin typeface="Cambria Math" panose="02040503050406030204" pitchFamily="18" charset="0"/>
+                      </a:rPr>
+                      <m:t>≥</m:t>
+                    </m:r>
+                    <m:sSub>
+                      <m:sSubPr>
+                        <m:ctrlPr>
+                          <a:rPr lang="en-US" b="0" i="1" smtClean="0">
+                            <a:latin typeface="Cambria Math" panose="02040503050406030204" pitchFamily="18" charset="0"/>
+                          </a:rPr>
+                        </m:ctrlPr>
+                      </m:sSubPr>
+                      <m:e>
+                        <m:r>
+                          <a:rPr lang="en-US" b="0" i="1" smtClean="0">
+                            <a:latin typeface="Cambria Math" panose="02040503050406030204" pitchFamily="18" charset="0"/>
+                          </a:rPr>
+                          <m:t>𝑛</m:t>
+                        </m:r>
+                      </m:e>
+                      <m:sub>
+                        <m:r>
+                          <a:rPr lang="en-US" b="0" i="1" smtClean="0">
+                            <a:latin typeface="Cambria Math" panose="02040503050406030204" pitchFamily="18" charset="0"/>
+                          </a:rPr>
+                          <m:t>0</m:t>
+                        </m:r>
+                      </m:sub>
+                    </m:sSub>
+                    <m:r>
+                      <a:rPr lang="en-US" b="0" i="1" smtClean="0">
+                        <a:latin typeface="Cambria Math" panose="02040503050406030204" pitchFamily="18" charset="0"/>
+                      </a:rPr>
+                      <m:t>. 13</m:t>
+                    </m:r>
+                    <m:sSup>
+                      <m:sSupPr>
+                        <m:ctrlPr>
+                          <a:rPr lang="en-US" b="0" i="1" smtClean="0">
+                            <a:latin typeface="Cambria Math" panose="02040503050406030204" pitchFamily="18" charset="0"/>
+                          </a:rPr>
+                        </m:ctrlPr>
+                      </m:sSupPr>
+                      <m:e>
+                        <m:r>
+                          <a:rPr lang="en-US" b="0" i="1" smtClean="0">
+                            <a:latin typeface="Cambria Math" panose="02040503050406030204" pitchFamily="18" charset="0"/>
+                          </a:rPr>
+                          <m:t>𝑛</m:t>
+                        </m:r>
+                      </m:e>
+                      <m:sup>
+                        <m:r>
+                          <a:rPr lang="en-US" b="0" i="1" smtClean="0">
+                            <a:latin typeface="Cambria Math" panose="02040503050406030204" pitchFamily="18" charset="0"/>
+                          </a:rPr>
+                          <m:t>2</m:t>
+                        </m:r>
+                      </m:sup>
+                    </m:sSup>
+                    <m:r>
+                      <a:rPr lang="en-US" b="0" i="1" smtClean="0">
+                        <a:latin typeface="Cambria Math" panose="02040503050406030204" pitchFamily="18" charset="0"/>
+                      </a:rPr>
+                      <m:t>−50</m:t>
+                    </m:r>
+                    <m:r>
+                      <a:rPr lang="en-US" b="0" i="1" smtClean="0">
+                        <a:latin typeface="Cambria Math" panose="02040503050406030204" pitchFamily="18" charset="0"/>
+                      </a:rPr>
+                      <m:t>𝑛</m:t>
+                    </m:r>
+                    <m:r>
+                      <a:rPr lang="en-US" b="0" i="1" smtClean="0">
+                        <a:latin typeface="Cambria Math" panose="02040503050406030204" pitchFamily="18" charset="0"/>
+                      </a:rPr>
+                      <m:t>≥</m:t>
+                    </m:r>
+                    <m:r>
+                      <a:rPr lang="en-US" b="0" i="1" smtClean="0">
+                        <a:latin typeface="Cambria Math" panose="02040503050406030204" pitchFamily="18" charset="0"/>
+                      </a:rPr>
+                      <m:t>𝑐</m:t>
+                    </m:r>
+                    <m:r>
+                      <a:rPr lang="en-US" b="0" i="1" smtClean="0">
+                        <a:latin typeface="Cambria Math" panose="02040503050406030204" pitchFamily="18" charset="0"/>
+                      </a:rPr>
+                      <m:t>⋅</m:t>
+                    </m:r>
+                    <m:sSup>
+                      <m:sSupPr>
+                        <m:ctrlPr>
+                          <a:rPr lang="en-US" b="0" i="1" smtClean="0">
+                            <a:latin typeface="Cambria Math" panose="02040503050406030204" pitchFamily="18" charset="0"/>
+                          </a:rPr>
+                        </m:ctrlPr>
+                      </m:sSupPr>
+                      <m:e>
+                        <m:r>
+                          <a:rPr lang="en-US" b="0" i="1" smtClean="0">
+                            <a:latin typeface="Cambria Math" panose="02040503050406030204" pitchFamily="18" charset="0"/>
+                          </a:rPr>
+                          <m:t>𝑛</m:t>
+                        </m:r>
+                      </m:e>
+                      <m:sup>
+                        <m:r>
+                          <a:rPr lang="en-US" b="0" i="1" smtClean="0">
+                            <a:latin typeface="Cambria Math" panose="02040503050406030204" pitchFamily="18" charset="0"/>
+                          </a:rPr>
+                          <m:t>2</m:t>
+                        </m:r>
+                      </m:sup>
+                    </m:sSup>
+                  </m:oMath>
+                </a14:m>
+                <a:endParaRPr lang="en-US" dirty="0"/>
+              </a:p>
+              <a:p>
+                <a:pPr lvl="1"/>
+                <a:r>
+                  <a:rPr lang="en-US" b="1" dirty="0"/>
+                  <a:t>Scratchwork:</a:t>
+                </a:r>
+              </a:p>
+              <a:p>
+                <a:pPr marL="457200" lvl="1" indent="0">
+                  <a:buNone/>
+                </a:pPr>
+                <a:r>
+                  <a:rPr lang="en-US" dirty="0"/>
+                  <a:t>	we need </a:t>
+                </a:r>
+                <a14:m>
+                  <m:oMath xmlns:m="http://schemas.openxmlformats.org/officeDocument/2006/math">
+                    <m:r>
+                      <a:rPr lang="en-US" b="0" i="1" smtClean="0">
+                        <a:latin typeface="Cambria Math" panose="02040503050406030204" pitchFamily="18" charset="0"/>
+                      </a:rPr>
+                      <m:t>13</m:t>
+                    </m:r>
+                    <m:sSup>
+                      <m:sSupPr>
+                        <m:ctrlPr>
+                          <a:rPr lang="en-US" b="0" i="1" smtClean="0">
+                            <a:latin typeface="Cambria Math" panose="02040503050406030204" pitchFamily="18" charset="0"/>
+                          </a:rPr>
+                        </m:ctrlPr>
+                      </m:sSupPr>
+                      <m:e>
+                        <m:r>
+                          <a:rPr lang="en-US" b="0" i="1" smtClean="0">
+                            <a:latin typeface="Cambria Math" panose="02040503050406030204" pitchFamily="18" charset="0"/>
+                          </a:rPr>
+                          <m:t>𝑛</m:t>
+                        </m:r>
+                      </m:e>
+                      <m:sup>
+                        <m:r>
+                          <a:rPr lang="en-US" b="0" i="1" smtClean="0">
+                            <a:latin typeface="Cambria Math" panose="02040503050406030204" pitchFamily="18" charset="0"/>
+                          </a:rPr>
+                          <m:t>2</m:t>
+                        </m:r>
+                      </m:sup>
+                    </m:sSup>
+                    <m:r>
+                      <a:rPr lang="en-US" b="0" i="1" smtClean="0">
+                        <a:latin typeface="Cambria Math" panose="02040503050406030204" pitchFamily="18" charset="0"/>
+                      </a:rPr>
+                      <m:t>−50</m:t>
+                    </m:r>
+                    <m:r>
+                      <a:rPr lang="en-US" b="0" i="1" smtClean="0">
+                        <a:latin typeface="Cambria Math" panose="02040503050406030204" pitchFamily="18" charset="0"/>
+                      </a:rPr>
+                      <m:t>𝑛</m:t>
+                    </m:r>
+                    <m:r>
+                      <a:rPr lang="en-US" b="0" i="1" smtClean="0">
+                        <a:latin typeface="Cambria Math" panose="02040503050406030204" pitchFamily="18" charset="0"/>
+                      </a:rPr>
+                      <m:t>≥</m:t>
+                    </m:r>
+                    <m:r>
+                      <a:rPr lang="en-US" b="0" i="1" smtClean="0">
+                        <a:latin typeface="Cambria Math" panose="02040503050406030204" pitchFamily="18" charset="0"/>
+                      </a:rPr>
+                      <m:t>𝑐</m:t>
+                    </m:r>
+                    <m:r>
+                      <a:rPr lang="en-US" b="0" i="1" smtClean="0">
+                        <a:latin typeface="Cambria Math" panose="02040503050406030204" pitchFamily="18" charset="0"/>
+                      </a:rPr>
+                      <m:t>⋅</m:t>
+                    </m:r>
+                    <m:sSup>
+                      <m:sSupPr>
+                        <m:ctrlPr>
+                          <a:rPr lang="en-US" b="0" i="1" smtClean="0">
+                            <a:latin typeface="Cambria Math" panose="02040503050406030204" pitchFamily="18" charset="0"/>
+                          </a:rPr>
+                        </m:ctrlPr>
+                      </m:sSupPr>
+                      <m:e>
+                        <m:r>
+                          <a:rPr lang="en-US" b="0" i="1" smtClean="0">
+                            <a:latin typeface="Cambria Math" panose="02040503050406030204" pitchFamily="18" charset="0"/>
+                          </a:rPr>
+                          <m:t>𝑛</m:t>
+                        </m:r>
+                      </m:e>
+                      <m:sup>
+                        <m:r>
+                          <a:rPr lang="en-US" b="0" i="1" smtClean="0">
+                            <a:latin typeface="Cambria Math" panose="02040503050406030204" pitchFamily="18" charset="0"/>
+                          </a:rPr>
+                          <m:t>2</m:t>
+                        </m:r>
+                      </m:sup>
+                    </m:sSup>
+                  </m:oMath>
+                </a14:m>
+                <a:endParaRPr lang="en-US" dirty="0"/>
+              </a:p>
+              <a:p>
+                <a:pPr marL="457200" lvl="1" indent="0">
+                  <a:buNone/>
+                </a:pPr>
+                <a:r>
+                  <a:rPr lang="en-US" dirty="0"/>
+                  <a:t>	equivalently, </a:t>
+                </a:r>
+                <a14:m>
+                  <m:oMath xmlns:m="http://schemas.openxmlformats.org/officeDocument/2006/math">
+                    <m:r>
+                      <a:rPr lang="en-US" b="0" i="1" smtClean="0">
+                        <a:latin typeface="Cambria Math" panose="02040503050406030204" pitchFamily="18" charset="0"/>
+                      </a:rPr>
+                      <m:t>13</m:t>
+                    </m:r>
+                    <m:r>
+                      <a:rPr lang="en-US" b="0" i="1" smtClean="0">
+                        <a:latin typeface="Cambria Math" panose="02040503050406030204" pitchFamily="18" charset="0"/>
+                      </a:rPr>
+                      <m:t>𝑛</m:t>
+                    </m:r>
+                    <m:r>
+                      <a:rPr lang="en-US" b="0" i="1" smtClean="0">
+                        <a:latin typeface="Cambria Math" panose="02040503050406030204" pitchFamily="18" charset="0"/>
+                      </a:rPr>
+                      <m:t>−50≥</m:t>
+                    </m:r>
+                    <m:r>
+                      <a:rPr lang="en-US" b="0" i="1" smtClean="0">
+                        <a:latin typeface="Cambria Math" panose="02040503050406030204" pitchFamily="18" charset="0"/>
+                      </a:rPr>
+                      <m:t>𝑐</m:t>
+                    </m:r>
+                    <m:r>
+                      <a:rPr lang="en-US" b="0" i="1" smtClean="0">
+                        <a:latin typeface="Cambria Math" panose="02040503050406030204" pitchFamily="18" charset="0"/>
+                      </a:rPr>
+                      <m:t>⋅</m:t>
+                    </m:r>
+                    <m:r>
+                      <a:rPr lang="en-US" b="0" i="1" smtClean="0">
+                        <a:latin typeface="Cambria Math" panose="02040503050406030204" pitchFamily="18" charset="0"/>
+                      </a:rPr>
+                      <m:t>𝑛</m:t>
+                    </m:r>
+                  </m:oMath>
+                </a14:m>
+                <a:endParaRPr lang="en-US" dirty="0"/>
+              </a:p>
+              <a:p>
+                <a:pPr marL="457200" lvl="1" indent="0">
+                  <a:buNone/>
+                </a:pPr>
+                <a:r>
+                  <a:rPr lang="en-US" dirty="0"/>
+                  <a:t>	It looks like things might simplify if we pick </a:t>
+                </a:r>
+                <a14:m>
+                  <m:oMath xmlns:m="http://schemas.openxmlformats.org/officeDocument/2006/math">
+                    <m:r>
+                      <a:rPr lang="en-US" b="0" i="1" smtClean="0">
+                        <a:latin typeface="Cambria Math" panose="02040503050406030204" pitchFamily="18" charset="0"/>
+                      </a:rPr>
+                      <m:t>𝑐</m:t>
+                    </m:r>
+                    <m:r>
+                      <a:rPr lang="en-US" b="0" i="1" smtClean="0">
+                        <a:latin typeface="Cambria Math" panose="02040503050406030204" pitchFamily="18" charset="0"/>
+                      </a:rPr>
+                      <m:t>=13</m:t>
+                    </m:r>
+                  </m:oMath>
+                </a14:m>
+                <a:endParaRPr lang="en-US" dirty="0"/>
+              </a:p>
+              <a:p>
+                <a:pPr marL="457200" lvl="1" indent="0">
+                  <a:buNone/>
+                </a:pPr>
+                <a:r>
+                  <a:rPr lang="en-US" dirty="0"/>
+                  <a:t>	Now we need </a:t>
+                </a:r>
+                <a14:m>
+                  <m:oMath xmlns:m="http://schemas.openxmlformats.org/officeDocument/2006/math">
+                    <m:r>
+                      <a:rPr lang="en-US" b="0" i="1" smtClean="0">
+                        <a:latin typeface="Cambria Math" panose="02040503050406030204" pitchFamily="18" charset="0"/>
+                      </a:rPr>
+                      <m:t>13</m:t>
+                    </m:r>
+                    <m:r>
+                      <a:rPr lang="en-US" b="0" i="1" smtClean="0">
+                        <a:latin typeface="Cambria Math" panose="02040503050406030204" pitchFamily="18" charset="0"/>
+                      </a:rPr>
+                      <m:t>𝑛</m:t>
+                    </m:r>
+                    <m:r>
+                      <a:rPr lang="en-US" b="0" i="1" smtClean="0">
+                        <a:latin typeface="Cambria Math" panose="02040503050406030204" pitchFamily="18" charset="0"/>
+                      </a:rPr>
+                      <m:t>−50≥13</m:t>
+                    </m:r>
+                    <m:r>
+                      <a:rPr lang="en-US" b="0" i="1" smtClean="0">
+                        <a:latin typeface="Cambria Math" panose="02040503050406030204" pitchFamily="18" charset="0"/>
+                      </a:rPr>
+                      <m:t>𝑛</m:t>
+                    </m:r>
+                  </m:oMath>
+                </a14:m>
+                <a:endParaRPr lang="en-US" dirty="0"/>
+              </a:p>
+              <a:p>
+                <a:pPr marL="457200" lvl="1" indent="0">
+                  <a:buNone/>
+                </a:pPr>
+                <a:r>
+                  <a:rPr lang="en-US" dirty="0"/>
+                  <a:t>	equivalently we need </a:t>
+                </a:r>
+                <a14:m>
+                  <m:oMath xmlns:m="http://schemas.openxmlformats.org/officeDocument/2006/math">
+                    <m:r>
+                      <a:rPr lang="en-US" b="0" i="1" smtClean="0">
+                        <a:latin typeface="Cambria Math" panose="02040503050406030204" pitchFamily="18" charset="0"/>
+                      </a:rPr>
+                      <m:t>−50≥0</m:t>
+                    </m:r>
+                  </m:oMath>
+                </a14:m>
+                <a:endParaRPr lang="en-US" dirty="0"/>
+              </a:p>
+              <a:p>
+                <a:pPr marL="457200" lvl="1" indent="0">
+                  <a:buNone/>
+                </a:pPr>
+                <a:r>
+                  <a:rPr lang="en-US" dirty="0"/>
+                  <a:t>	hmmm….. That didn’t work! But, it tells us that to make the left hand side bigger, it needs to be 50 larger than the right! This means we definitely need </a:t>
+                </a:r>
+                <a14:m>
+                  <m:oMath xmlns:m="http://schemas.openxmlformats.org/officeDocument/2006/math">
+                    <m:r>
+                      <a:rPr lang="en-US" b="0" i="1" smtClean="0">
+                        <a:latin typeface="Cambria Math" panose="02040503050406030204" pitchFamily="18" charset="0"/>
+                      </a:rPr>
+                      <m:t>𝑐</m:t>
+                    </m:r>
+                    <m:r>
+                      <a:rPr lang="en-US" b="0" i="1" smtClean="0">
+                        <a:latin typeface="Cambria Math" panose="02040503050406030204" pitchFamily="18" charset="0"/>
+                      </a:rPr>
+                      <m:t>&lt;13</m:t>
+                    </m:r>
+                  </m:oMath>
+                </a14:m>
+                <a:endParaRPr lang="en-US" dirty="0"/>
+              </a:p>
+              <a:p>
+                <a:pPr marL="457200" lvl="1" indent="0">
+                  <a:buNone/>
+                </a:pPr>
+                <a:r>
+                  <a:rPr lang="en-US" dirty="0"/>
+                  <a:t>	let’s instead use </a:t>
+                </a:r>
+                <a14:m>
+                  <m:oMath xmlns:m="http://schemas.openxmlformats.org/officeDocument/2006/math">
+                    <m:r>
+                      <a:rPr lang="en-US" b="0" i="1" smtClean="0">
+                        <a:latin typeface="Cambria Math" panose="02040503050406030204" pitchFamily="18" charset="0"/>
+                      </a:rPr>
+                      <m:t>𝑐</m:t>
+                    </m:r>
+                    <m:r>
+                      <a:rPr lang="en-US" b="0" i="1" smtClean="0">
+                        <a:latin typeface="Cambria Math" panose="02040503050406030204" pitchFamily="18" charset="0"/>
+                      </a:rPr>
+                      <m:t>=12</m:t>
+                    </m:r>
+                  </m:oMath>
+                </a14:m>
+                <a:r>
+                  <a:rPr lang="en-US" dirty="0"/>
+                  <a:t>, now we need </a:t>
+                </a:r>
+                <a14:m>
+                  <m:oMath xmlns:m="http://schemas.openxmlformats.org/officeDocument/2006/math">
+                    <m:r>
+                      <a:rPr lang="en-US" b="0" i="1" smtClean="0">
+                        <a:latin typeface="Cambria Math" panose="02040503050406030204" pitchFamily="18" charset="0"/>
+                      </a:rPr>
+                      <m:t>13</m:t>
+                    </m:r>
+                    <m:r>
+                      <a:rPr lang="en-US" b="0" i="1" smtClean="0">
+                        <a:latin typeface="Cambria Math" panose="02040503050406030204" pitchFamily="18" charset="0"/>
+                      </a:rPr>
+                      <m:t>𝑛</m:t>
+                    </m:r>
+                    <m:r>
+                      <a:rPr lang="en-US" b="0" i="1" smtClean="0">
+                        <a:latin typeface="Cambria Math" panose="02040503050406030204" pitchFamily="18" charset="0"/>
+                      </a:rPr>
+                      <m:t>−50≥12</m:t>
+                    </m:r>
+                    <m:r>
+                      <a:rPr lang="en-US" b="0" i="1" smtClean="0">
+                        <a:latin typeface="Cambria Math" panose="02040503050406030204" pitchFamily="18" charset="0"/>
+                      </a:rPr>
+                      <m:t>𝑛</m:t>
+                    </m:r>
+                  </m:oMath>
+                </a14:m>
+                <a:endParaRPr lang="en-US" dirty="0"/>
+              </a:p>
+              <a:p>
+                <a:pPr marL="457200" lvl="1" indent="0">
+                  <a:buNone/>
+                </a:pPr>
+                <a:r>
+                  <a:rPr lang="en-US" dirty="0"/>
+                  <a:t>	This simplifies to </a:t>
+                </a:r>
+                <a14:m>
+                  <m:oMath xmlns:m="http://schemas.openxmlformats.org/officeDocument/2006/math">
+                    <m:r>
+                      <a:rPr lang="en-US" b="0" i="1" smtClean="0">
+                        <a:latin typeface="Cambria Math" panose="02040503050406030204" pitchFamily="18" charset="0"/>
+                      </a:rPr>
+                      <m:t>𝑛</m:t>
+                    </m:r>
+                    <m:r>
+                      <a:rPr lang="en-US" b="0" i="1" smtClean="0">
+                        <a:latin typeface="Cambria Math" panose="02040503050406030204" pitchFamily="18" charset="0"/>
+                      </a:rPr>
+                      <m:t>≥50</m:t>
+                    </m:r>
+                  </m:oMath>
+                </a14:m>
+                <a:r>
+                  <a:rPr lang="en-US" dirty="0"/>
+                  <a:t>, so we can use </a:t>
+                </a:r>
+                <a14:m>
+                  <m:oMath xmlns:m="http://schemas.openxmlformats.org/officeDocument/2006/math">
+                    <m:r>
+                      <a:rPr lang="en-US" b="0" i="1" smtClean="0">
+                        <a:latin typeface="Cambria Math" panose="02040503050406030204" pitchFamily="18" charset="0"/>
+                      </a:rPr>
+                      <m:t>50</m:t>
+                    </m:r>
+                  </m:oMath>
+                </a14:m>
+                <a:r>
+                  <a:rPr lang="en-US" dirty="0"/>
+                  <a:t> as </a:t>
+                </a:r>
+                <a14:m>
+                  <m:oMath xmlns:m="http://schemas.openxmlformats.org/officeDocument/2006/math">
+                    <m:sSub>
+                      <m:sSubPr>
+                        <m:ctrlPr>
+                          <a:rPr lang="en-US" b="0" i="1" smtClean="0">
+                            <a:latin typeface="Cambria Math" panose="02040503050406030204" pitchFamily="18" charset="0"/>
+                          </a:rPr>
+                        </m:ctrlPr>
+                      </m:sSubPr>
+                      <m:e>
+                        <m:r>
+                          <a:rPr lang="en-US" b="0" i="1" smtClean="0">
+                            <a:latin typeface="Cambria Math" panose="02040503050406030204" pitchFamily="18" charset="0"/>
+                          </a:rPr>
+                          <m:t>𝑛</m:t>
+                        </m:r>
+                      </m:e>
+                      <m:sub>
+                        <m:r>
+                          <a:rPr lang="en-US" b="0" i="1" smtClean="0">
+                            <a:latin typeface="Cambria Math" panose="02040503050406030204" pitchFamily="18" charset="0"/>
+                          </a:rPr>
+                          <m:t>0</m:t>
+                        </m:r>
+                      </m:sub>
+                    </m:sSub>
+                  </m:oMath>
+                </a14:m>
+                <a:endParaRPr lang="en-US" dirty="0"/>
+              </a:p>
+            </p:txBody>
+          </p:sp>
+        </mc:Choice>
+        <mc:Fallback xmlns="">
+          <p:sp>
+            <p:nvSpPr>
+              <p:cNvPr id="3" name="Content Placeholder 2">
+                <a:extLst>
+                  <a:ext uri="{FF2B5EF4-FFF2-40B4-BE49-F238E27FC236}">
+                    <a16:creationId xmlns:a16="http://schemas.microsoft.com/office/drawing/2014/main" id="{B715BD7A-5944-DE50-FFDA-22BA9A22331A}"/>
+                  </a:ext>
+                </a:extLst>
+              </p:cNvPr>
+              <p:cNvSpPr>
+                <a:spLocks noGrp="1" noRot="1" noChangeAspect="1" noMove="1" noResize="1" noEditPoints="1" noAdjustHandles="1" noChangeArrowheads="1" noChangeShapeType="1" noTextEdit="1"/>
+              </p:cNvSpPr>
+              <p:nvPr>
+                <p:ph idx="1"/>
+              </p:nvPr>
+            </p:nvSpPr>
+            <p:spPr>
+              <a:xfrm>
+                <a:off x="609600" y="1874837"/>
+                <a:ext cx="11430000" cy="4525963"/>
+              </a:xfrm>
+              <a:blipFill>
+                <a:blip r:embed="rId2"/>
+                <a:stretch>
+                  <a:fillRect l="-960" t="-3100"/>
+                </a:stretch>
+              </a:blipFill>
+            </p:spPr>
+            <p:txBody>
+              <a:bodyPr/>
+              <a:lstStyle/>
+              <a:p>
+                <a:r>
+                  <a:rPr lang="en-US">
+                    <a:noFill/>
+                  </a:rPr>
+                  <a:t> </a:t>
+                </a:r>
+              </a:p>
+            </p:txBody>
+          </p:sp>
+        </mc:Fallback>
+      </mc:AlternateContent>
+    </p:spTree>
+    <p:extLst>
+      <p:ext uri="{BB962C8B-B14F-4D97-AF65-F5344CB8AC3E}">
+        <p14:creationId xmlns:p14="http://schemas.microsoft.com/office/powerpoint/2010/main" val="3560150392"/>
+      </p:ext>
+    </p:extLst>
+  </p:cSld>
+  <p:clrMapOvr>
+    <a:masterClrMapping/>
+  </p:clrMapOvr>
+</p:sld>
+</file>
+
+<file path=ppt/slides/slide13.xml><?xml version="1.0" encoding="utf-8"?>
+<p:sld xmlns:a="http://schemas.openxmlformats.org/drawingml/2006/main" xmlns:r="http://schemas.openxmlformats.org/officeDocument/2006/relationships" xmlns:p="http://schemas.openxmlformats.org/presentationml/2006/main">
+  <p:cSld>
+    <p:spTree>
+      <p:nvGrpSpPr>
+        <p:cNvPr id="1" name="">
+          <a:extLst>
+            <a:ext uri="{FF2B5EF4-FFF2-40B4-BE49-F238E27FC236}">
               <a16:creationId xmlns:a16="http://schemas.microsoft.com/office/drawing/2014/main" id="{54C99128-3B0A-EEBD-AA47-0A2E16E0C5D9}"/>
             </a:ext>
           </a:extLst>
@@ -6001,7 +6855,7 @@
     </p:spTree>
     <p:extLst>
       <p:ext uri="{BB962C8B-B14F-4D97-AF65-F5344CB8AC3E}">
-        <p14:creationId xmlns:p14="http://schemas.microsoft.com/office/powerpoint/2010/main" val="1240778617"/>
+        <p14:creationId xmlns:p14="http://schemas.microsoft.com/office/powerpoint/2010/main" val="3615634086"/>
       </p:ext>
     </p:extLst>
   </p:cSld>
@@ -6011,7 +6865,7 @@
 </p:sld>
 </file>
 
-<file path=ppt/slides/slide13.xml><?xml version="1.0" encoding="utf-8"?>
+<file path=ppt/slides/slide14.xml><?xml version="1.0" encoding="utf-8"?>
 <p:sld xmlns:a="http://schemas.openxmlformats.org/drawingml/2006/main" xmlns:r="http://schemas.openxmlformats.org/officeDocument/2006/relationships" xmlns:p="http://schemas.openxmlformats.org/presentationml/2006/main">
   <p:cSld>
     <p:spTree>
@@ -6727,7 +7581,7 @@
 </p:sld>
 </file>
 
-<file path=ppt/slides/slide14.xml><?xml version="1.0" encoding="utf-8"?>
+<file path=ppt/slides/slide15.xml><?xml version="1.0" encoding="utf-8"?>
 <p:sld xmlns:a="http://schemas.openxmlformats.org/drawingml/2006/main" xmlns:r="http://schemas.openxmlformats.org/officeDocument/2006/relationships" xmlns:p="http://schemas.openxmlformats.org/presentationml/2006/main">
   <p:cSld>
     <p:spTree>
@@ -7267,7 +8121,7 @@
 </p:sld>
 </file>
 
-<file path=ppt/slides/slide15.xml><?xml version="1.0" encoding="utf-8"?>
+<file path=ppt/slides/slide16.xml><?xml version="1.0" encoding="utf-8"?>
 <p:sld xmlns:a="http://schemas.openxmlformats.org/drawingml/2006/main" xmlns:r="http://schemas.openxmlformats.org/officeDocument/2006/relationships" xmlns:p="http://schemas.openxmlformats.org/presentationml/2006/main">
   <p:cSld>
     <p:spTree>
@@ -8666,7 +9520,7 @@
 </p:sld>
 </file>
 
-<file path=ppt/slides/slide16.xml><?xml version="1.0" encoding="utf-8"?>
+<file path=ppt/slides/slide17.xml><?xml version="1.0" encoding="utf-8"?>
 <p:sld xmlns:a="http://schemas.openxmlformats.org/drawingml/2006/main" xmlns:r="http://schemas.openxmlformats.org/officeDocument/2006/relationships" xmlns:p="http://schemas.openxmlformats.org/presentationml/2006/main">
   <p:cSld>
     <p:spTree>
@@ -9170,7 +10024,7 @@
 </p:sld>
 </file>
 
-<file path=ppt/slides/slide17.xml><?xml version="1.0" encoding="utf-8"?>
+<file path=ppt/slides/slide18.xml><?xml version="1.0" encoding="utf-8"?>
 <p:sld xmlns:a="http://schemas.openxmlformats.org/drawingml/2006/main" xmlns:r="http://schemas.openxmlformats.org/officeDocument/2006/relationships" xmlns:p="http://schemas.openxmlformats.org/presentationml/2006/main">
   <p:cSld>
     <p:spTree>
@@ -9312,7 +10166,7 @@
 </p:sld>
 </file>
 
-<file path=ppt/slides/slide18.xml><?xml version="1.0" encoding="utf-8"?>
+<file path=ppt/slides/slide19.xml><?xml version="1.0" encoding="utf-8"?>
 <p:sld xmlns:a="http://schemas.openxmlformats.org/drawingml/2006/main" xmlns:r="http://schemas.openxmlformats.org/officeDocument/2006/relationships" xmlns:p="http://schemas.openxmlformats.org/presentationml/2006/main">
   <p:cSld>
     <p:spTree>
@@ -9484,7 +10338,144 @@
 </p:sld>
 </file>
 
-<file path=ppt/slides/slide19.xml><?xml version="1.0" encoding="utf-8"?>
+<file path=ppt/slides/slide2.xml><?xml version="1.0" encoding="utf-8"?>
+<p:sld xmlns:a="http://schemas.openxmlformats.org/drawingml/2006/main" xmlns:r="http://schemas.openxmlformats.org/officeDocument/2006/relationships" xmlns:p="http://schemas.openxmlformats.org/presentationml/2006/main">
+  <p:cSld>
+    <p:spTree>
+      <p:nvGrpSpPr>
+        <p:cNvPr id="1" name="">
+          <a:extLst>
+            <a:ext uri="{FF2B5EF4-FFF2-40B4-BE49-F238E27FC236}">
+              <a16:creationId xmlns:a16="http://schemas.microsoft.com/office/drawing/2014/main" id="{6BDDA77C-4A87-5E53-6319-C9EFC70A52D5}"/>
+            </a:ext>
+          </a:extLst>
+        </p:cNvPr>
+        <p:cNvGrpSpPr/>
+        <p:nvPr/>
+      </p:nvGrpSpPr>
+      <p:grpSpPr>
+        <a:xfrm>
+          <a:off x="0" y="0"/>
+          <a:ext cx="0" cy="0"/>
+          <a:chOff x="0" y="0"/>
+          <a:chExt cx="0" cy="0"/>
+        </a:xfrm>
+      </p:grpSpPr>
+      <p:sp>
+        <p:nvSpPr>
+          <p:cNvPr id="2" name="Title 1">
+            <a:extLst>
+              <a:ext uri="{FF2B5EF4-FFF2-40B4-BE49-F238E27FC236}">
+                <a16:creationId xmlns:a16="http://schemas.microsoft.com/office/drawing/2014/main" id="{22277576-0109-DA35-2F93-CE5D43AFCFCF}"/>
+              </a:ext>
+            </a:extLst>
+          </p:cNvPr>
+          <p:cNvSpPr>
+            <a:spLocks noGrp="1"/>
+          </p:cNvSpPr>
+          <p:nvPr>
+            <p:ph type="title"/>
+          </p:nvPr>
+        </p:nvSpPr>
+        <p:spPr/>
+        <p:txBody>
+          <a:bodyPr/>
+          <a:lstStyle/>
+          <a:p>
+            <a:r>
+              <a:rPr lang="en-US" dirty="0"/>
+              <a:t>Motivation for Algorithm Analysis</a:t>
+            </a:r>
+          </a:p>
+        </p:txBody>
+      </p:sp>
+      <p:sp>
+        <p:nvSpPr>
+          <p:cNvPr id="3" name="Content Placeholder 2">
+            <a:extLst>
+              <a:ext uri="{FF2B5EF4-FFF2-40B4-BE49-F238E27FC236}">
+                <a16:creationId xmlns:a16="http://schemas.microsoft.com/office/drawing/2014/main" id="{7C5E9410-A0C9-D0C4-B386-64C237AAACE5}"/>
+              </a:ext>
+            </a:extLst>
+          </p:cNvPr>
+          <p:cNvSpPr>
+            <a:spLocks noGrp="1"/>
+          </p:cNvSpPr>
+          <p:nvPr>
+            <p:ph idx="1"/>
+          </p:nvPr>
+        </p:nvSpPr>
+        <p:spPr/>
+        <p:txBody>
+          <a:bodyPr>
+            <a:normAutofit/>
+          </a:bodyPr>
+          <a:lstStyle/>
+          <a:p>
+            <a:r>
+              <a:rPr lang="en-US" dirty="0"/>
+              <a:t>We want to define algorithm running times in a way that’s predictive:</a:t>
+            </a:r>
+          </a:p>
+          <a:p>
+            <a:pPr lvl="1"/>
+            <a:r>
+              <a:rPr lang="en-US" dirty="0"/>
+              <a:t>We’re not required to </a:t>
+            </a:r>
+            <a:r>
+              <a:rPr lang="en-US" dirty="0" err="1"/>
+              <a:t>implement+run</a:t>
+            </a:r>
+            <a:r>
+              <a:rPr lang="en-US" dirty="0"/>
+              <a:t> the algorithms to determine the time</a:t>
+            </a:r>
+          </a:p>
+          <a:p>
+            <a:pPr lvl="1"/>
+            <a:r>
+              <a:rPr lang="en-US" dirty="0"/>
+              <a:t>Our conclusions do not depend on how the algorithm is implemented/run</a:t>
+            </a:r>
+          </a:p>
+          <a:p>
+            <a:pPr lvl="2"/>
+            <a:r>
+              <a:rPr lang="en-US" dirty="0"/>
+              <a:t>E.g. variation in choice of programming language, machine, or other tasks the computer is doing in parallel</a:t>
+            </a:r>
+          </a:p>
+          <a:p>
+            <a:pPr lvl="1"/>
+            <a:r>
+              <a:rPr lang="en-US" dirty="0"/>
+              <a:t>We can use it to compare running times of different algorithms</a:t>
+            </a:r>
+          </a:p>
+          <a:p>
+            <a:pPr lvl="1"/>
+            <a:r>
+              <a:rPr lang="en-US" dirty="0"/>
+              <a:t>We do not need to select an input size in advance</a:t>
+            </a:r>
+          </a:p>
+        </p:txBody>
+      </p:sp>
+    </p:spTree>
+    <p:extLst>
+      <p:ext uri="{BB962C8B-B14F-4D97-AF65-F5344CB8AC3E}">
+        <p14:creationId xmlns:p14="http://schemas.microsoft.com/office/powerpoint/2010/main" val="992738403"/>
+      </p:ext>
+    </p:extLst>
+  </p:cSld>
+  <p:clrMapOvr>
+    <a:masterClrMapping/>
+  </p:clrMapOvr>
+</p:sld>
+</file>
+
+<file path=ppt/slides/slide20.xml><?xml version="1.0" encoding="utf-8"?>
 <p:sld xmlns:a="http://schemas.openxmlformats.org/drawingml/2006/main" xmlns:r="http://schemas.openxmlformats.org/officeDocument/2006/relationships" xmlns:p="http://schemas.openxmlformats.org/presentationml/2006/main">
   <p:cSld>
     <p:spTree>
@@ -9928,144 +10919,7 @@
 </p:sld>
 </file>
 
-<file path=ppt/slides/slide2.xml><?xml version="1.0" encoding="utf-8"?>
-<p:sld xmlns:a="http://schemas.openxmlformats.org/drawingml/2006/main" xmlns:r="http://schemas.openxmlformats.org/officeDocument/2006/relationships" xmlns:p="http://schemas.openxmlformats.org/presentationml/2006/main">
-  <p:cSld>
-    <p:spTree>
-      <p:nvGrpSpPr>
-        <p:cNvPr id="1" name="">
-          <a:extLst>
-            <a:ext uri="{FF2B5EF4-FFF2-40B4-BE49-F238E27FC236}">
-              <a16:creationId xmlns:a16="http://schemas.microsoft.com/office/drawing/2014/main" id="{6BDDA77C-4A87-5E53-6319-C9EFC70A52D5}"/>
-            </a:ext>
-          </a:extLst>
-        </p:cNvPr>
-        <p:cNvGrpSpPr/>
-        <p:nvPr/>
-      </p:nvGrpSpPr>
-      <p:grpSpPr>
-        <a:xfrm>
-          <a:off x="0" y="0"/>
-          <a:ext cx="0" cy="0"/>
-          <a:chOff x="0" y="0"/>
-          <a:chExt cx="0" cy="0"/>
-        </a:xfrm>
-      </p:grpSpPr>
-      <p:sp>
-        <p:nvSpPr>
-          <p:cNvPr id="2" name="Title 1">
-            <a:extLst>
-              <a:ext uri="{FF2B5EF4-FFF2-40B4-BE49-F238E27FC236}">
-                <a16:creationId xmlns:a16="http://schemas.microsoft.com/office/drawing/2014/main" id="{22277576-0109-DA35-2F93-CE5D43AFCFCF}"/>
-              </a:ext>
-            </a:extLst>
-          </p:cNvPr>
-          <p:cNvSpPr>
-            <a:spLocks noGrp="1"/>
-          </p:cNvSpPr>
-          <p:nvPr>
-            <p:ph type="title"/>
-          </p:nvPr>
-        </p:nvSpPr>
-        <p:spPr/>
-        <p:txBody>
-          <a:bodyPr/>
-          <a:lstStyle/>
-          <a:p>
-            <a:r>
-              <a:rPr lang="en-US" dirty="0"/>
-              <a:t>Motivation for Algorithm Analysis</a:t>
-            </a:r>
-          </a:p>
-        </p:txBody>
-      </p:sp>
-      <p:sp>
-        <p:nvSpPr>
-          <p:cNvPr id="3" name="Content Placeholder 2">
-            <a:extLst>
-              <a:ext uri="{FF2B5EF4-FFF2-40B4-BE49-F238E27FC236}">
-                <a16:creationId xmlns:a16="http://schemas.microsoft.com/office/drawing/2014/main" id="{7C5E9410-A0C9-D0C4-B386-64C237AAACE5}"/>
-              </a:ext>
-            </a:extLst>
-          </p:cNvPr>
-          <p:cNvSpPr>
-            <a:spLocks noGrp="1"/>
-          </p:cNvSpPr>
-          <p:nvPr>
-            <p:ph idx="1"/>
-          </p:nvPr>
-        </p:nvSpPr>
-        <p:spPr/>
-        <p:txBody>
-          <a:bodyPr>
-            <a:normAutofit/>
-          </a:bodyPr>
-          <a:lstStyle/>
-          <a:p>
-            <a:r>
-              <a:rPr lang="en-US" dirty="0"/>
-              <a:t>We want to define algorithm running times in a way that’s predictive:</a:t>
-            </a:r>
-          </a:p>
-          <a:p>
-            <a:pPr lvl="1"/>
-            <a:r>
-              <a:rPr lang="en-US" dirty="0"/>
-              <a:t>We’re not required to </a:t>
-            </a:r>
-            <a:r>
-              <a:rPr lang="en-US" dirty="0" err="1"/>
-              <a:t>implement+run</a:t>
-            </a:r>
-            <a:r>
-              <a:rPr lang="en-US" dirty="0"/>
-              <a:t> the algorithms to determine the time</a:t>
-            </a:r>
-          </a:p>
-          <a:p>
-            <a:pPr lvl="1"/>
-            <a:r>
-              <a:rPr lang="en-US" dirty="0"/>
-              <a:t>Our conclusions do not depend on how the algorithm is implemented/run</a:t>
-            </a:r>
-          </a:p>
-          <a:p>
-            <a:pPr lvl="2"/>
-            <a:r>
-              <a:rPr lang="en-US" dirty="0"/>
-              <a:t>E.g. variation in choice of programming language, machine, or other tasks the computer is doing in parallel</a:t>
-            </a:r>
-          </a:p>
-          <a:p>
-            <a:pPr lvl="1"/>
-            <a:r>
-              <a:rPr lang="en-US" dirty="0"/>
-              <a:t>We can use it to compare running times of different algorithms</a:t>
-            </a:r>
-          </a:p>
-          <a:p>
-            <a:pPr lvl="1"/>
-            <a:r>
-              <a:rPr lang="en-US" dirty="0"/>
-              <a:t>We do not need to select an input size in advance</a:t>
-            </a:r>
-          </a:p>
-        </p:txBody>
-      </p:sp>
-    </p:spTree>
-    <p:extLst>
-      <p:ext uri="{BB962C8B-B14F-4D97-AF65-F5344CB8AC3E}">
-        <p14:creationId xmlns:p14="http://schemas.microsoft.com/office/powerpoint/2010/main" val="992738403"/>
-      </p:ext>
-    </p:extLst>
-  </p:cSld>
-  <p:clrMapOvr>
-    <a:masterClrMapping/>
-  </p:clrMapOvr>
-</p:sld>
-</file>
-
-<file path=ppt/slides/slide20.xml><?xml version="1.0" encoding="utf-8"?>
+<file path=ppt/slides/slide21.xml><?xml version="1.0" encoding="utf-8"?>
 <p:sld xmlns:a="http://schemas.openxmlformats.org/drawingml/2006/main" xmlns:r="http://schemas.openxmlformats.org/officeDocument/2006/relationships" xmlns:p="http://schemas.openxmlformats.org/presentationml/2006/main">
   <p:cSld>
     <p:spTree>
@@ -10509,7 +11363,7 @@
 </p:sld>
 </file>
 
-<file path=ppt/slides/slide21.xml><?xml version="1.0" encoding="utf-8"?>
+<file path=ppt/slides/slide22.xml><?xml version="1.0" encoding="utf-8"?>
 <p:sld xmlns:a="http://schemas.openxmlformats.org/drawingml/2006/main" xmlns:r="http://schemas.openxmlformats.org/officeDocument/2006/relationships" xmlns:p="http://schemas.openxmlformats.org/presentationml/2006/main">
   <p:cSld>
     <p:spTree>
@@ -10592,7 +11446,7 @@
 </p:sld>
 </file>
 
-<file path=ppt/slides/slide22.xml><?xml version="1.0" encoding="utf-8"?>
+<file path=ppt/slides/slide23.xml><?xml version="1.0" encoding="utf-8"?>
 <p:sld xmlns:a="http://schemas.openxmlformats.org/drawingml/2006/main" xmlns:r="http://schemas.openxmlformats.org/officeDocument/2006/relationships" xmlns:p="http://schemas.openxmlformats.org/presentationml/2006/main">
   <p:cSld>
     <p:spTree>
@@ -11006,7 +11860,7 @@
 </p:sld>
 </file>
 
-<file path=ppt/slides/slide23.xml><?xml version="1.0" encoding="utf-8"?>
+<file path=ppt/slides/slide24.xml><?xml version="1.0" encoding="utf-8"?>
 <p:sld xmlns:a="http://schemas.openxmlformats.org/drawingml/2006/main" xmlns:r="http://schemas.openxmlformats.org/officeDocument/2006/relationships" xmlns:p="http://schemas.openxmlformats.org/presentationml/2006/main">
   <p:cSld>
     <p:spTree>
@@ -12384,7 +13238,7 @@
 </p:sld>
 </file>
 
-<file path=ppt/slides/slide24.xml><?xml version="1.0" encoding="utf-8"?>
+<file path=ppt/slides/slide25.xml><?xml version="1.0" encoding="utf-8"?>
 <p:sld xmlns:a="http://schemas.openxmlformats.org/drawingml/2006/main" xmlns:r="http://schemas.openxmlformats.org/officeDocument/2006/relationships" xmlns:p="http://schemas.openxmlformats.org/presentationml/2006/main">
   <p:cSld>
     <p:spTree>
@@ -13485,7 +14339,7 @@
 </p:sld>
 </file>
 
-<file path=ppt/slides/slide25.xml><?xml version="1.0" encoding="utf-8"?>
+<file path=ppt/slides/slide26.xml><?xml version="1.0" encoding="utf-8"?>
 <p:sld xmlns:a="http://schemas.openxmlformats.org/drawingml/2006/main" xmlns:r="http://schemas.openxmlformats.org/officeDocument/2006/relationships" xmlns:p="http://schemas.openxmlformats.org/presentationml/2006/main">
   <p:cSld>
     <p:spTree>
@@ -14970,7 +15824,7 @@
 </p:sld>
 </file>
 
-<file path=ppt/slides/slide26.xml><?xml version="1.0" encoding="utf-8"?>
+<file path=ppt/slides/slide27.xml><?xml version="1.0" encoding="utf-8"?>
 <p:sld xmlns:a="http://schemas.openxmlformats.org/drawingml/2006/main" xmlns:r="http://schemas.openxmlformats.org/officeDocument/2006/relationships" xmlns:p="http://schemas.openxmlformats.org/presentationml/2006/main">
   <p:cSld>
     <p:spTree>
@@ -15393,7 +16247,7 @@
 </p:sld>
 </file>
 
-<file path=ppt/slides/slide27.xml><?xml version="1.0" encoding="utf-8"?>
+<file path=ppt/slides/slide28.xml><?xml version="1.0" encoding="utf-8"?>
 <p:sld xmlns:a="http://schemas.openxmlformats.org/drawingml/2006/main" xmlns:r="http://schemas.openxmlformats.org/officeDocument/2006/relationships" xmlns:p="http://schemas.openxmlformats.org/presentationml/2006/main">
   <p:cSld>
     <p:spTree>
